--- a/assets/powerpoints/module-n2-panier/B2-ma-liste-un-une-des.pptx
+++ b/assets/powerpoints/module-n2-panier/B2-ma-liste-un-une-des.pptx
@@ -8984,13 +8984,13 @@
               </a:lnSpc>
             </a:pPr>
             <a:r>
-              <a:rPr sz="1800" b="0" i="0">
+              <a:rPr sz="1800" b="1" i="0">
                 <a:solidFill>
                   <a:srgbClr val="3A3D40"/>
                 </a:solidFill>
                 <a:latin typeface="Verdana"/>
               </a:rPr>
-              <a:t>&lt;b&gt;un&lt;/b&gt;</a:t>
+              <a:t>un</a:t>
             </a:r>
           </a:p>
         </p:txBody>
@@ -9104,13 +9104,13 @@
               </a:lnSpc>
             </a:pPr>
             <a:r>
-              <a:rPr sz="1800" b="0" i="0">
+              <a:rPr sz="1800" b="1" i="0">
                 <a:solidFill>
                   <a:srgbClr val="3A3D40"/>
                 </a:solidFill>
                 <a:latin typeface="Verdana"/>
               </a:rPr>
-              <a:t>&lt;b&gt;une&lt;/b&gt;</a:t>
+              <a:t>une</a:t>
             </a:r>
           </a:p>
         </p:txBody>
@@ -9224,13 +9224,13 @@
               </a:lnSpc>
             </a:pPr>
             <a:r>
-              <a:rPr sz="1800" b="0" i="0">
+              <a:rPr sz="1800" b="1" i="0">
                 <a:solidFill>
                   <a:srgbClr val="3A3D40"/>
                 </a:solidFill>
                 <a:latin typeface="Verdana"/>
               </a:rPr>
-              <a:t>&lt;b&gt;des&lt;/b&gt;</a:t>
+              <a:t>des</a:t>
             </a:r>
           </a:p>
         </p:txBody>
@@ -9344,13 +9344,31 @@
               </a:lnSpc>
             </a:pPr>
             <a:r>
+              <a:rPr sz="1800" b="1" i="0">
+                <a:solidFill>
+                  <a:srgbClr val="3A3D40"/>
+                </a:solidFill>
+                <a:latin typeface="Verdana"/>
+              </a:rPr>
+              <a:t>de</a:t>
+            </a:r>
+            <a:r>
               <a:rPr sz="1800" b="0" i="0">
                 <a:solidFill>
                   <a:srgbClr val="3A3D40"/>
                 </a:solidFill>
                 <a:latin typeface="Verdana"/>
               </a:rPr>
-              <a:t>&lt;b&gt;de&lt;/b&gt; / &lt;b&gt;d'&lt;/b&gt;</a:t>
+              <a:t> / </a:t>
+            </a:r>
+            <a:r>
+              <a:rPr sz="1800" b="1" i="0">
+                <a:solidFill>
+                  <a:srgbClr val="3A3D40"/>
+                </a:solidFill>
+                <a:latin typeface="Verdana"/>
+              </a:rPr>
+              <a:t>d'</a:t>
             </a:r>
           </a:p>
         </p:txBody>
@@ -9821,7 +9839,97 @@
                 </a:solidFill>
                 <a:latin typeface="Verdana"/>
               </a:rPr>
-              <a:t>« J'ai &lt;b&gt;du&lt;/b&gt; riz » devient « je n'ai &lt;b&gt;pas de&lt;/b&gt; riz ». « J'ai &lt;b&gt;des&lt;/b&gt; œufs » devient « je n'ai &lt;b&gt;pas d'&lt;/b&gt;œufs ». Devant une voyelle, « de » perd son e et devient &lt;b&gt;d'&lt;/b&gt;.</a:t>
+              <a:t>« J'ai </a:t>
+            </a:r>
+            <a:r>
+              <a:rPr sz="2000" b="1" i="0">
+                <a:solidFill>
+                  <a:srgbClr val="4B4F52"/>
+                </a:solidFill>
+                <a:latin typeface="Verdana"/>
+              </a:rPr>
+              <a:t>du</a:t>
+            </a:r>
+            <a:r>
+              <a:rPr sz="2000" b="0" i="0">
+                <a:solidFill>
+                  <a:srgbClr val="4B4F52"/>
+                </a:solidFill>
+                <a:latin typeface="Verdana"/>
+              </a:rPr>
+              <a:t> riz » devient « je n'ai </a:t>
+            </a:r>
+            <a:r>
+              <a:rPr sz="2000" b="1" i="0">
+                <a:solidFill>
+                  <a:srgbClr val="4B4F52"/>
+                </a:solidFill>
+                <a:latin typeface="Verdana"/>
+              </a:rPr>
+              <a:t>pas de</a:t>
+            </a:r>
+            <a:r>
+              <a:rPr sz="2000" b="0" i="0">
+                <a:solidFill>
+                  <a:srgbClr val="4B4F52"/>
+                </a:solidFill>
+                <a:latin typeface="Verdana"/>
+              </a:rPr>
+              <a:t> riz ». « J'ai </a:t>
+            </a:r>
+            <a:r>
+              <a:rPr sz="2000" b="1" i="0">
+                <a:solidFill>
+                  <a:srgbClr val="4B4F52"/>
+                </a:solidFill>
+                <a:latin typeface="Verdana"/>
+              </a:rPr>
+              <a:t>des</a:t>
+            </a:r>
+            <a:r>
+              <a:rPr sz="2000" b="0" i="0">
+                <a:solidFill>
+                  <a:srgbClr val="4B4F52"/>
+                </a:solidFill>
+                <a:latin typeface="Verdana"/>
+              </a:rPr>
+              <a:t> œufs » devient « je n'ai </a:t>
+            </a:r>
+            <a:r>
+              <a:rPr sz="2000" b="1" i="0">
+                <a:solidFill>
+                  <a:srgbClr val="4B4F52"/>
+                </a:solidFill>
+                <a:latin typeface="Verdana"/>
+              </a:rPr>
+              <a:t>pas d'</a:t>
+            </a:r>
+            <a:r>
+              <a:rPr sz="2000" b="0" i="0">
+                <a:solidFill>
+                  <a:srgbClr val="4B4F52"/>
+                </a:solidFill>
+                <a:latin typeface="Verdana"/>
+              </a:rPr>
+              <a:t>œufs ». Devant une voyelle, « de » perd son e et devient </a:t>
+            </a:r>
+            <a:r>
+              <a:rPr sz="2000" b="1" i="0">
+                <a:solidFill>
+                  <a:srgbClr val="4B4F52"/>
+                </a:solidFill>
+                <a:latin typeface="Verdana"/>
+              </a:rPr>
+              <a:t>d'</a:t>
+            </a:r>
+            <a:r>
+              <a:rPr sz="2000" b="0" i="0">
+                <a:solidFill>
+                  <a:srgbClr val="4B4F52"/>
+                </a:solidFill>
+                <a:latin typeface="Verdana"/>
+              </a:rPr>
+              <a:t>.</a:t>
             </a:r>
           </a:p>
         </p:txBody>
@@ -10370,7 +10478,43 @@
                 </a:solidFill>
                 <a:latin typeface="Verdana"/>
               </a:rPr>
-              <a:t>C'est la faute la plus fréquente du niveau, et elle vient de ce que la phrase affirmative dit bien « j'ai &lt;b&gt;du&lt;/b&gt; riz ». Après « pas », il ne reste que &lt;b&gt;de&lt;/b&gt; : ni du, ni de la, ni des.</a:t>
+              <a:t>C'est la faute la plus fréquente du niveau, et elle vient de ce que la phrase affirmative dit bien « j'ai </a:t>
+            </a:r>
+            <a:r>
+              <a:rPr sz="2000" b="1" i="0">
+                <a:solidFill>
+                  <a:srgbClr val="4B4F52"/>
+                </a:solidFill>
+                <a:latin typeface="Verdana"/>
+              </a:rPr>
+              <a:t>du</a:t>
+            </a:r>
+            <a:r>
+              <a:rPr sz="2000" b="0" i="0">
+                <a:solidFill>
+                  <a:srgbClr val="4B4F52"/>
+                </a:solidFill>
+                <a:latin typeface="Verdana"/>
+              </a:rPr>
+              <a:t> riz ». Après « pas », il ne reste que </a:t>
+            </a:r>
+            <a:r>
+              <a:rPr sz="2000" b="1" i="0">
+                <a:solidFill>
+                  <a:srgbClr val="4B4F52"/>
+                </a:solidFill>
+                <a:latin typeface="Verdana"/>
+              </a:rPr>
+              <a:t>de</a:t>
+            </a:r>
+            <a:r>
+              <a:rPr sz="2000" b="0" i="0">
+                <a:solidFill>
+                  <a:srgbClr val="4B4F52"/>
+                </a:solidFill>
+                <a:latin typeface="Verdana"/>
+              </a:rPr>
+              <a:t> : ni du, ni de la, ni des.</a:t>
             </a:r>
           </a:p>
         </p:txBody>
